--- a/templates/posts/october/01-10-2026-thu-li-boubacar-strip.pptx
+++ b/templates/posts/october/01-10-2026-thu-li-boubacar-strip.pptx
@@ -3584,7 +3584,7 @@
       </p:sp>
       <p:pic>
         <p:nvPicPr>
-          <p:cNvPr id="4" name="Picture 3" descr="9011766215753034190.jpg"/>
+          <p:cNvPr id="4" name="Picture 3" descr="5527043534450088322.jpg"/>
           <p:cNvPicPr>
             <a:picLocks noChangeAspect="1"/>
           </p:cNvPicPr>
@@ -3658,7 +3658,7 @@
       </p:sp>
       <p:pic>
         <p:nvPicPr>
-          <p:cNvPr id="6" name="Picture 5" descr="4661564634153178448.jpg"/>
+          <p:cNvPr id="6" name="Picture 5" descr="262170456428427238.jpg"/>
           <p:cNvPicPr>
             <a:picLocks noChangeAspect="1"/>
           </p:cNvPicPr>
@@ -3732,7 +3732,7 @@
       </p:sp>
       <p:pic>
         <p:nvPicPr>
-          <p:cNvPr id="8" name="Picture 7" descr="4927884398861364573.jpg"/>
+          <p:cNvPr id="8" name="Picture 7" descr="8829693080199242592.jpg"/>
           <p:cNvPicPr>
             <a:picLocks noChangeAspect="1"/>
           </p:cNvPicPr>
@@ -3786,8 +3786,8 @@
         </p:nvSpPr>
         <p:spPr>
           <a:xfrm>
-            <a:off x="571500" y="4400550"/>
-            <a:ext cx="9525000" cy="323850"/>
+            <a:off x="571500" y="4457700"/>
+            <a:ext cx="9525000" cy="285750"/>
           </a:xfrm>
           <a:prstGeom prst="rect">
             <a:avLst/>
@@ -3825,8 +3825,8 @@
         </p:nvSpPr>
         <p:spPr>
           <a:xfrm>
-            <a:off x="571500" y="4762500"/>
-            <a:ext cx="10287000" cy="609600"/>
+            <a:off x="571500" y="4648200"/>
+            <a:ext cx="10287000" cy="533400"/>
           </a:xfrm>
           <a:prstGeom prst="rect">
             <a:avLst/>
@@ -3864,8 +3864,8 @@
         </p:nvSpPr>
         <p:spPr>
           <a:xfrm>
-            <a:off x="571500" y="5381625"/>
-            <a:ext cx="10287000" cy="381000"/>
+            <a:off x="571500" y="5295900"/>
+            <a:ext cx="10287000" cy="342900"/>
           </a:xfrm>
           <a:prstGeom prst="rect">
             <a:avLst/>

--- a/templates/posts/october/01-10-2026-thu-li-boubacar-strip.pptx
+++ b/templates/posts/october/01-10-2026-thu-li-boubacar-strip.pptx
@@ -3584,7 +3584,7 @@
       </p:sp>
       <p:pic>
         <p:nvPicPr>
-          <p:cNvPr id="4" name="Picture 3" descr="5527043534450088322.jpg"/>
+          <p:cNvPr id="4" name="Picture 3" descr="6405100189297841215.jpg"/>
           <p:cNvPicPr>
             <a:picLocks noChangeAspect="1"/>
           </p:cNvPicPr>
@@ -3658,7 +3658,7 @@
       </p:sp>
       <p:pic>
         <p:nvPicPr>
-          <p:cNvPr id="6" name="Picture 5" descr="262170456428427238.jpg"/>
+          <p:cNvPr id="6" name="Picture 5" descr="1656593245713716640.jpg"/>
           <p:cNvPicPr>
             <a:picLocks noChangeAspect="1"/>
           </p:cNvPicPr>
@@ -3732,7 +3732,7 @@
       </p:sp>
       <p:pic>
         <p:nvPicPr>
-          <p:cNvPr id="8" name="Picture 7" descr="8829693080199242592.jpg"/>
+          <p:cNvPr id="8" name="Picture 7" descr="5037366236674745391.jpg"/>
           <p:cNvPicPr>
             <a:picLocks noChangeAspect="1"/>
           </p:cNvPicPr>
